--- a/Презентация/dds.pptx
+++ b/Презентация/dds.pptx
@@ -10479,7 +10479,19 @@
                 <a:cs typeface="Roboto"/>
                 <a:sym typeface="Roboto"/>
               </a:rPr>
-              <a:t>Руководитель направления разработки ЭДО</a:t>
+              <a:t>Руководитель </a:t>
+            </a:r>
+            <a:r>
+              <a:rPr lang="ru-RU">
+                <a:solidFill>
+                  <a:srgbClr val="000000"/>
+                </a:solidFill>
+                <a:latin typeface="Roboto"/>
+                <a:ea typeface="Roboto"/>
+                <a:cs typeface="Roboto"/>
+                <a:sym typeface="Roboto"/>
+              </a:rPr>
+              <a:t>направления разработки</a:t>
             </a:r>
             <a:endParaRPr dirty="0">
               <a:solidFill>
@@ -12860,14 +12872,14 @@
           <p:nvPr>
             <p:extLst>
               <p:ext uri="{D42A27DB-BD31-4B8C-83A1-F6EECF244321}">
-                <p14:modId xmlns:p14="http://schemas.microsoft.com/office/powerpoint/2010/main" val="2068614286"/>
+                <p14:modId xmlns:p14="http://schemas.microsoft.com/office/powerpoint/2010/main" val="126164533"/>
               </p:ext>
             </p:extLst>
           </p:nvPr>
         </p:nvGraphicFramePr>
         <p:xfrm>
           <a:off x="952500" y="1544194"/>
-          <a:ext cx="7239000" cy="1398676"/>
+          <a:ext cx="7239000" cy="1063406"/>
         </p:xfrm>
         <a:graphic>
           <a:graphicData uri="http://schemas.openxmlformats.org/drawingml/2006/table">
@@ -13245,7 +13257,7 @@
                         <a:buNone/>
                       </a:pPr>
                       <a:r>
-                        <a:rPr lang="ru" sz="1300" b="1">
+                        <a:rPr lang="en-US" sz="1300" b="1" dirty="0">
                           <a:solidFill>
                             <a:srgbClr val="FF9900"/>
                           </a:solidFill>
@@ -13254,9 +13266,21 @@
                           <a:cs typeface="Roboto"/>
                           <a:sym typeface="Roboto"/>
                         </a:rPr>
-                        <a:t>3.</a:t>
+                        <a:t>3</a:t>
                       </a:r>
-                      <a:endParaRPr sz="1300" b="1">
+                      <a:r>
+                        <a:rPr lang="ru" sz="1300" b="1" dirty="0">
+                          <a:solidFill>
+                            <a:srgbClr val="FF9900"/>
+                          </a:solidFill>
+                          <a:latin typeface="Roboto"/>
+                          <a:ea typeface="Roboto"/>
+                          <a:cs typeface="Roboto"/>
+                          <a:sym typeface="Roboto"/>
+                        </a:rPr>
+                        <a:t>.</a:t>
+                      </a:r>
+                      <a:endParaRPr sz="1300" b="1" dirty="0">
                         <a:solidFill>
                           <a:srgbClr val="FF9900"/>
                         </a:solidFill>
@@ -13279,7 +13303,7 @@
                       <a:headEnd type="none" w="sm" len="sm"/>
                       <a:tailEnd type="none" w="sm" len="sm"/>
                     </a:lnL>
-                    <a:lnR w="9525" cap="flat" cmpd="sng">
+                    <a:lnR w="9525" cap="flat" cmpd="sng" algn="ctr">
                       <a:solidFill>
                         <a:schemeClr val="lt1">
                           <a:alpha val="0"/>
@@ -13290,166 +13314,7 @@
                       <a:headEnd type="none" w="sm" len="sm"/>
                       <a:tailEnd type="none" w="sm" len="sm"/>
                     </a:lnR>
-                    <a:lnT w="9525" cap="flat" cmpd="sng">
-                      <a:solidFill>
-                        <a:srgbClr val="9E9E9E"/>
-                      </a:solidFill>
-                      <a:prstDash val="solid"/>
-                      <a:round/>
-                      <a:headEnd type="none" w="sm" len="sm"/>
-                      <a:tailEnd type="none" w="sm" len="sm"/>
-                    </a:lnT>
-                    <a:lnB w="9525" cap="flat" cmpd="sng">
-                      <a:solidFill>
-                        <a:srgbClr val="9E9E9E"/>
-                      </a:solidFill>
-                      <a:prstDash val="solid"/>
-                      <a:round/>
-                      <a:headEnd type="none" w="sm" len="sm"/>
-                      <a:tailEnd type="none" w="sm" len="sm"/>
-                    </a:lnB>
-                  </a:tcPr>
-                </a:tc>
-                <a:tc>
-                  <a:txBody>
-                    <a:bodyPr/>
-                    <a:lstStyle/>
-                    <a:p>
-                      <a:pPr marL="0" lvl="0" indent="0" algn="l" rtl="0">
-                        <a:lnSpc>
-                          <a:spcPct val="115000"/>
-                        </a:lnSpc>
-                        <a:spcBef>
-                          <a:spcPts val="0"/>
-                        </a:spcBef>
-                        <a:spcAft>
-                          <a:spcPts val="0"/>
-                        </a:spcAft>
-                        <a:buNone/>
-                      </a:pPr>
-                      <a:r>
-                        <a:rPr lang="en-US" sz="1200" dirty="0" err="1"/>
-                        <a:t>tpcc.lua</a:t>
-                      </a:r>
-                      <a:endParaRPr sz="1300" dirty="0">
-                        <a:latin typeface="Roboto"/>
-                        <a:ea typeface="Roboto"/>
-                        <a:cs typeface="Roboto"/>
-                        <a:sym typeface="Roboto"/>
-                      </a:endParaRPr>
-                    </a:p>
-                  </a:txBody>
-                  <a:tcPr marL="198000" marR="91425" marT="68575" marB="68575">
-                    <a:lnL w="9525" cap="flat" cmpd="sng">
-                      <a:solidFill>
-                        <a:schemeClr val="lt1">
-                          <a:alpha val="0"/>
-                        </a:schemeClr>
-                      </a:solidFill>
-                      <a:prstDash val="solid"/>
-                      <a:round/>
-                      <a:headEnd type="none" w="sm" len="sm"/>
-                      <a:tailEnd type="none" w="sm" len="sm"/>
-                    </a:lnL>
-                    <a:lnR w="9525" cap="flat" cmpd="sng">
-                      <a:solidFill>
-                        <a:srgbClr val="BFC1F0">
-                          <a:alpha val="0"/>
-                        </a:srgbClr>
-                      </a:solidFill>
-                      <a:prstDash val="solid"/>
-                      <a:round/>
-                      <a:headEnd type="none" w="sm" len="sm"/>
-                      <a:tailEnd type="none" w="sm" len="sm"/>
-                    </a:lnR>
-                    <a:lnT w="9525" cap="flat" cmpd="sng">
-                      <a:solidFill>
-                        <a:srgbClr val="9E9E9E"/>
-                      </a:solidFill>
-                      <a:prstDash val="solid"/>
-                      <a:round/>
-                      <a:headEnd type="none" w="sm" len="sm"/>
-                      <a:tailEnd type="none" w="sm" len="sm"/>
-                    </a:lnT>
-                    <a:lnB w="9525" cap="flat" cmpd="sng">
-                      <a:solidFill>
-                        <a:srgbClr val="9E9E9E"/>
-                      </a:solidFill>
-                      <a:prstDash val="solid"/>
-                      <a:round/>
-                      <a:headEnd type="none" w="sm" len="sm"/>
-                      <a:tailEnd type="none" w="sm" len="sm"/>
-                    </a:lnB>
-                  </a:tcPr>
-                </a:tc>
-                <a:extLst>
-                  <a:ext uri="{0D108BD9-81ED-4DB2-BD59-A6C34878D82A}">
-                    <a16:rowId xmlns:a16="http://schemas.microsoft.com/office/drawing/2014/main" val="10002"/>
-                  </a:ext>
-                </a:extLst>
-              </a:tr>
-              <a:tr h="285750">
-                <a:tc>
-                  <a:txBody>
-                    <a:bodyPr/>
-                    <a:lstStyle/>
-                    <a:p>
-                      <a:pPr marL="0" lvl="0" indent="0" algn="l" rtl="0">
-                        <a:spcBef>
-                          <a:spcPts val="0"/>
-                        </a:spcBef>
-                        <a:spcAft>
-                          <a:spcPts val="0"/>
-                        </a:spcAft>
-                        <a:buNone/>
-                      </a:pPr>
-                      <a:r>
-                        <a:rPr lang="ru" sz="1300" b="1">
-                          <a:solidFill>
-                            <a:srgbClr val="FF9900"/>
-                          </a:solidFill>
-                          <a:latin typeface="Roboto"/>
-                          <a:ea typeface="Roboto"/>
-                          <a:cs typeface="Roboto"/>
-                          <a:sym typeface="Roboto"/>
-                        </a:rPr>
-                        <a:t>4.</a:t>
-                      </a:r>
-                      <a:endParaRPr sz="1300" b="1">
-                        <a:solidFill>
-                          <a:srgbClr val="FF9900"/>
-                        </a:solidFill>
-                        <a:latin typeface="Roboto"/>
-                        <a:ea typeface="Roboto"/>
-                        <a:cs typeface="Roboto"/>
-                        <a:sym typeface="Roboto"/>
-                      </a:endParaRPr>
-                    </a:p>
-                  </a:txBody>
-                  <a:tcPr marL="198000" marR="91425" marT="68575" marB="68575">
-                    <a:lnL w="9525" cap="flat" cmpd="sng">
-                      <a:solidFill>
-                        <a:srgbClr val="BFC1F0">
-                          <a:alpha val="0"/>
-                        </a:srgbClr>
-                      </a:solidFill>
-                      <a:prstDash val="solid"/>
-                      <a:round/>
-                      <a:headEnd type="none" w="sm" len="sm"/>
-                      <a:tailEnd type="none" w="sm" len="sm"/>
-                    </a:lnL>
-                    <a:lnR w="9525" cap="flat" cmpd="sng">
-                      <a:solidFill>
-                        <a:schemeClr val="lt1">
-                          <a:alpha val="0"/>
-                        </a:schemeClr>
-                      </a:solidFill>
-                      <a:prstDash val="solid"/>
-                      <a:round/>
-                      <a:headEnd type="none" w="sm" len="sm"/>
-                      <a:tailEnd type="none" w="sm" len="sm"/>
-                    </a:lnR>
-                    <a:lnT w="9525" cap="flat" cmpd="sng">
+                    <a:lnT w="9525" cap="flat" cmpd="sng" algn="ctr">
                       <a:solidFill>
                         <a:srgbClr val="9E9E9E"/>
                       </a:solidFill>
@@ -13504,7 +13369,7 @@
                     </a:p>
                   </a:txBody>
                   <a:tcPr marL="198000" marR="91425" marT="68575" marB="68575">
-                    <a:lnL w="9525" cap="flat" cmpd="sng">
+                    <a:lnL w="9525" cap="flat" cmpd="sng" algn="ctr">
                       <a:solidFill>
                         <a:schemeClr val="lt1">
                           <a:alpha val="0"/>
@@ -13526,7 +13391,7 @@
                       <a:headEnd type="none" w="sm" len="sm"/>
                       <a:tailEnd type="none" w="sm" len="sm"/>
                     </a:lnR>
-                    <a:lnT w="9525" cap="flat" cmpd="sng">
+                    <a:lnT w="9525" cap="flat" cmpd="sng" algn="ctr">
                       <a:solidFill>
                         <a:srgbClr val="9E9E9E"/>
                       </a:solidFill>
